--- a/docs/webinars/04-the-investor-platform.pptx
+++ b/docs/webinars/04-the-investor-platform.pptx
@@ -521,7 +521,7 @@
           <a:p>
             <a:r>
               <a:rPr lang="en-US" dirty="0"/>
-              <a:t>The longest session in the series — the investor platform end to end. First what investors see, then the seven-tab studio that drives it, then the working routines: accounts, holdings, cash events, reports, insights, raises, documents and support. Take a break in the middle if you need one.</a:t>
+              <a:t>The longest session in the series: the investor platform end to end. First what investors see, then the seven-tab studio that drives it, then the working routines: accounts, holdings, cash events, reports, insights, raises, documents and support. Take a break in the middle if you need one.</a:t>
             </a:r>
             <a:endParaRPr lang="en-US" dirty="0"/>
           </a:p>
@@ -609,7 +609,7 @@
           <a:p>
             <a:r>
               <a:rPr lang="en-US" dirty="0"/>
-              <a:t>Check after saving: on the Investors tab the account now shows the position, a value equal to share% × equity value, and reads “Invested” automatically. Re-saving the same investor+SPV replaces the position — that's also how you correct one.</a:t>
+              <a:t>Check after saving: on the Investors tab the account now shows the position, a value equal to share % × equity value, and reads “Invested” automatically. Re-saving the same investor and SPV replaces the position. That is also how you correct one.</a:t>
             </a:r>
             <a:endParaRPr lang="en-US" dirty="0"/>
           </a:p>
@@ -785,7 +785,7 @@
           <a:p>
             <a:r>
               <a:rPr lang="en-US" dirty="0"/>
-              <a:t>The task syntax is the only fiddly bit: two “ — ” separators per line. If a task looks wrong in the portal, a missing separator is almost always why. To see reports as investors do, keep an in-house invested account.</a:t>
+              <a:t>The task syntax is the only fiddly bit: two “ -- ” separators per line (a long dash works too). If a task looks wrong in the portal, a missing separator is almost always why. To see reports as investors do, keep an in-house invested account.</a:t>
             </a:r>
             <a:endParaRPr lang="en-US" dirty="0"/>
           </a:p>
@@ -873,7 +873,7 @@
           <a:p>
             <a:r>
               <a:rPr lang="en-US" dirty="0"/>
-              <a:t>The two-part design (file into public/investor-reports/, path in the form) is the pattern for every attached document on the platform. Same Claude request works for data-room files — two slides ahead.</a:t>
+              <a:t>The two-part design (file into public/investor-reports/, path in the form) is the pattern for every attached document on the platform. The same Claude request works for data-room files, two slides ahead.</a:t>
             </a:r>
             <a:endParaRPr lang="en-US" dirty="0"/>
           </a:p>
@@ -961,7 +961,7 @@
           <a:p>
             <a:r>
               <a:rPr lang="en-US" dirty="0"/>
-              <a:t>Richer blocks — statistic rows, tables, coloured callouts — exist through the JSON importer; ask Claude to add one. The slug-replace behaviour is the one asymmetry with news stories worth calling out twice.</a:t>
+              <a:t>Richer blocks (statistic rows, tables, coloured callouts) exist through the JSON importer; ask Claude to add one. The slug-replace behaviour is the one asymmetry with news stories worth calling out twice.</a:t>
             </a:r>
             <a:endParaRPr lang="en-US" dirty="0"/>
           </a:p>
@@ -1049,7 +1049,7 @@
           <a:p>
             <a:r>
               <a:rPr lang="en-US" dirty="0"/>
-              <a:t>Plain English for the terms: IRR = annualised return the deal aims for; multiple = money back per pound in (1.6x = £1.60 per £1). Updating uses the fill-in-everything rule: type the opportunity's ID, complete the whole form, save.</a:t>
+              <a:t>Plain English for the terms: IRR is the annualised return the deal aims for; multiple is money back per pound in (1.6x means £1.60 per £1). Updating uses the fill-in-everything rule: type the opportunity's ID, complete the whole form, save.</a:t>
             </a:r>
             <a:endParaRPr lang="en-US" dirty="0"/>
           </a:p>
@@ -1137,7 +1137,7 @@
           <a:p>
             <a:r>
               <a:rPr lang="en-US" dirty="0"/>
-              <a:t>Also update Progress %, phase/status and next-report date while in the development form — they set expectations in the portal. Do all three steps together and every portal is current at once.</a:t>
+              <a:t>Also update Progress %, phase/status and next-report date while in the development form; they set expectations in the portal. Do all three steps together and every portal is current at once.</a:t>
             </a:r>
             <a:endParaRPr lang="en-US" dirty="0"/>
           </a:p>
@@ -1225,7 +1225,7 @@
           <a:p>
             <a:r>
               <a:rPr lang="en-US" dirty="0"/>
-              <a:t>Under the hood Claude sets the audience and stores the PDF under public/ — nothing you need to do. The verification habit in step 3 is non-negotiable for private documents.</a:t>
+              <a:t>Under the hood Claude sets the audience and stores the PDF under public/. Nothing you need to do. The verification habit in step 3 is non-negotiable for private documents.</a:t>
             </a:r>
             <a:endParaRPr lang="en-US" dirty="0"/>
           </a:p>
@@ -1313,7 +1313,7 @@
           <a:p>
             <a:r>
               <a:rPr lang="en-US" dirty="0"/>
-              <a:t>The blank-password rule works in your favour: leaving Password empty when updating keeps the current one — routine detail edits can never accidentally lock someone out. To see what an investor sees, keep one in-house invested and one prospective account.</a:t>
+              <a:t>The blank-password rule works in your favour: leaving Password empty when updating keeps the current one, so routine detail edits can never accidentally lock anyone out. To see what an investor sees, keep one in-house invested and one prospective account.</a:t>
             </a:r>
             <a:endParaRPr lang="en-US" dirty="0"/>
           </a:p>
@@ -1401,7 +1401,7 @@
           <a:p>
             <a:r>
               <a:rPr lang="en-US" dirty="0"/>
-              <a:t>The export is also the bridge to Claude for bulk edits: download, attach to a session, describe the changes, import — or let studio saves commit directly on the live site (webinar 06 covers the token that enables that).</a:t>
+              <a:t>The export is also the bridge to Claude for bulk edits: download, attach to a session, describe the changes, import. Or let studio saves commit directly on the live site (webinar 06 covers the token that enables that).</a:t>
             </a:r>
             <a:endParaRPr lang="en-US" dirty="0"/>
           </a:p>
@@ -1665,7 +1665,7 @@
           <a:p>
             <a:r>
               <a:rPr lang="en-US" dirty="0"/>
-              <a:t>Show the live page if connected. The enquiry form is new — it captures prospective investors in the platform's own branding and emails each submission to the enquiries inbox (covered in webinar 07).</a:t>
+              <a:t>Show the live page if connected. The enquiry form is new. It captures prospective investors in the platform's own branding and emails each submission to the enquiries inbox (covered in webinar 07).</a:t>
             </a:r>
             <a:endParaRPr lang="en-US" dirty="0"/>
           </a:p>
@@ -1753,7 +1753,7 @@
           <a:p>
             <a:r>
               <a:rPr lang="en-US" dirty="0"/>
-              <a:t>Let the room absorb the screenshot — most of the team never sees the portal from the investor side. The framing sentence matters: the portal is a projection of the studio's data, which is why the studio routines are the whole game.</a:t>
+              <a:t>Let the room absorb the screenshot; most of the team never sees the portal from the investor side. The framing sentence matters: the portal is a projection of the studio's data, which is why the studio routines are the whole game.</a:t>
             </a:r>
             <a:endParaRPr lang="en-US" dirty="0"/>
           </a:p>
@@ -1841,7 +1841,7 @@
           <a:p>
             <a:r>
               <a:rPr lang="en-US" dirty="0"/>
-              <a:t>The automatic tier is a favourite support fact: record a cap-table position and the account upgrades itself to invested — no switch to remember. The override drop-down on the investor form exists for rare exceptions only. My portfolio is the newest section: one tab per investment, each with its own private file library.</a:t>
+              <a:t>The automatic tier is a favourite support fact: record a cap-table position and the account upgrades itself to invested. No switch to remember. The override drop-down on the investor form exists for rare exceptions only. My portfolio is the newest section: one tab per investment, each with its own private file library.</a:t>
             </a:r>
             <a:endParaRPr lang="en-US" dirty="0"/>
           </a:p>
@@ -1929,7 +1929,7 @@
           <a:p>
             <a:r>
               <a:rPr lang="en-US" dirty="0"/>
-              <a:t>Don't teach every tab now — this is the map. SPV in plain English: the limited company set up to own one development; investors buy shares in the SPV, not the building. Cap table: the list of who owns what percentage of it.</a:t>
+              <a:t>Don't teach every tab now; this is the map. SPV in plain English: the limited company set up to own one development. Investors buy shares in the SPV, not the building. Cap table: the list of who owns what percentage of it.</a:t>
             </a:r>
             <a:endParaRPr lang="en-US" dirty="0"/>
           </a:p>
@@ -2017,7 +2017,7 @@
           <a:p>
             <a:r>
               <a:rPr lang="en-US" dirty="0"/>
-              <a:t>This is the platform's single most important idea and the diagnosis shortcut for every “my valuation looks wrong” call. Weighted IRR and distributions derive similarly — from SPV forecasts and paid cash events.</a:t>
+              <a:t>This is the platform's single most important idea and the diagnosis shortcut for every “my valuation looks wrong” call. Weighted IRR and distributions derive similarly, from SPV forecasts and paid cash events.</a:t>
             </a:r>
             <a:endParaRPr lang="en-US" dirty="0"/>
           </a:p>
@@ -2105,7 +2105,7 @@
           <a:p>
             <a:r>
               <a:rPr lang="en-US" dirty="0"/>
-              <a:t>Emphasise noting the starting password before saving — hashed means unreadable afterwards. The account card's ID (shown as “ID …”) is how you address the account later for updates.</a:t>
+              <a:t>Emphasise noting the starting password before saving. Hashed means unreadable afterwards. The account card's ID (shown as “ID …”) is how you address the account later for updates.</a:t>
             </a:r>
             <a:endParaRPr lang="en-US" dirty="0"/>
           </a:p>
@@ -2193,7 +2193,7 @@
           <a:p>
             <a:r>
               <a:rPr lang="en-US" dirty="0"/>
-              <a:t>Same handover discipline as admin accounts. Investors are exactly the audience attackers would impersonate — a phone call for the password is thirty seconds well spent.</a:t>
+              <a:t>Same handover discipline as admin accounts. Investors are exactly the audience attackers would impersonate. A phone call for the password is thirty seconds well spent.</a:t>
             </a:r>
             <a:endParaRPr lang="en-US" dirty="0"/>
           </a:p>
@@ -2668,7 +2668,7 @@
                 <a:ea typeface="Work Sans" pitchFamily="34" charset="-122"/>
                 <a:cs typeface="Work Sans" pitchFamily="34" charset="-120"/>
               </a:rPr>
-              <a:t>SATIS GROUP — BACKEND WEBINAR SERIES</a:t>
+              <a:t>SATIS GROUP · BACKEND WEBINAR SERIES</a:t>
             </a:r>
             <a:endParaRPr lang="en-US" sz="950" dirty="0"/>
           </a:p>
@@ -2930,7 +2930,7 @@
                 <a:ea typeface="Work Sans" pitchFamily="34" charset="-122"/>
                 <a:cs typeface="Work Sans" pitchFamily="34" charset="-120"/>
               </a:rPr>
-              <a:t>ROUTINE — MONEY</a:t>
+              <a:t>ROUTINE · MONEY</a:t>
             </a:r>
             <a:endParaRPr lang="en-US" sz="950" dirty="0"/>
           </a:p>
@@ -3070,7 +3070,7 @@
                 <a:ea typeface="Work Sans" pitchFamily="34" charset="-122"/>
                 <a:cs typeface="Work Sans" pitchFamily="34" charset="-120"/>
               </a:rPr>
-              <a:t>SATIS GROUP — THE INVESTOR PLATFORM</a:t>
+              <a:t>SATIS GROUP · THE INVESTOR PLATFORM</a:t>
             </a:r>
             <a:endParaRPr lang="en-US" sz="700" dirty="0"/>
           </a:p>
@@ -3516,7 +3516,7 @@
                 <a:ea typeface="Work Sans" pitchFamily="34" charset="-122"/>
                 <a:cs typeface="Work Sans" pitchFamily="34" charset="-120"/>
               </a:rPr>
-              <a:t>Platform investor — or external holder</a:t>
+              <a:t>Platform investor, or external holder</a:t>
             </a:r>
             <a:endParaRPr lang="en-US" sz="1200" dirty="0"/>
           </a:p>
@@ -3698,7 +3698,7 @@
                 <a:ea typeface="Work Sans" pitchFamily="34" charset="-122"/>
                 <a:cs typeface="Work Sans" pitchFamily="34" charset="-120"/>
               </a:rPr>
-              <a:t>What they put in — £250k and £250,000 both work.</a:t>
+              <a:t>What they put in. £250k and £250,000 both work.</a:t>
             </a:r>
             <a:endParaRPr lang="en-US" sz="950" dirty="0"/>
           </a:p>
@@ -3838,7 +3838,7 @@
                 <a:ea typeface="Work Sans" pitchFamily="34" charset="-122"/>
                 <a:cs typeface="Work Sans" pitchFamily="34" charset="-120"/>
               </a:rPr>
-              <a:t>Their agreed percentage of the SPV — e.g. 12.5.</a:t>
+              <a:t>Their agreed percentage of the SPV, e.g. 12.5.</a:t>
             </a:r>
             <a:endParaRPr lang="en-US" sz="950" dirty="0"/>
           </a:p>
@@ -4103,7 +4103,7 @@
                 <a:ea typeface="Work Sans" pitchFamily="34" charset="-122"/>
                 <a:cs typeface="Work Sans" pitchFamily="34" charset="-120"/>
               </a:rPr>
-              <a:t>One SPV's positions can never exceed 100% — the form refuses and names the total it would have reached. Surprised? Something already on the table holds that share.</a:t>
+              <a:t>One SPV's positions can never exceed 100%. The form refuses and names the total it would have reached. Surprised? Something already on the table holds that share.</a:t>
             </a:r>
             <a:endParaRPr lang="en-US" sz="1100" dirty="0"/>
           </a:p>
@@ -4167,7 +4167,7 @@
                 <a:ea typeface="Work Sans" pitchFamily="34" charset="-122"/>
                 <a:cs typeface="Work Sans" pitchFamily="34" charset="-120"/>
               </a:rPr>
-              <a:t>ROUTINE — MONEY</a:t>
+              <a:t>ROUTINE · MONEY</a:t>
             </a:r>
             <a:endParaRPr lang="en-US" sz="950" dirty="0"/>
           </a:p>
@@ -4307,7 +4307,7 @@
                 <a:ea typeface="Work Sans" pitchFamily="34" charset="-122"/>
                 <a:cs typeface="Work Sans" pitchFamily="34" charset="-120"/>
               </a:rPr>
-              <a:t>SATIS GROUP — THE INVESTOR PLATFORM</a:t>
+              <a:t>SATIS GROUP · THE INVESTOR PLATFORM</a:t>
             </a:r>
             <a:endParaRPr lang="en-US" sz="700" dirty="0"/>
           </a:p>
@@ -5340,7 +5340,7 @@
                 <a:ea typeface="Work Sans" pitchFamily="34" charset="-122"/>
                 <a:cs typeface="Work Sans" pitchFamily="34" charset="-120"/>
               </a:rPr>
-              <a:t>Record a new event with status Paid, then Remove the old forecast entry — leaving both double-counts the history.</a:t>
+              <a:t>Record a new event with status Paid, then Remove the old forecast entry. Leaving both double-counts the history.</a:t>
             </a:r>
             <a:endParaRPr lang="en-US" sz="1100" dirty="0"/>
           </a:p>
@@ -5404,7 +5404,7 @@
                 <a:ea typeface="Work Sans" pitchFamily="34" charset="-122"/>
                 <a:cs typeface="Work Sans" pitchFamily="34" charset="-120"/>
               </a:rPr>
-              <a:t>ROUTINE — PUBLISHING</a:t>
+              <a:t>ROUTINE · PUBLISHING</a:t>
             </a:r>
             <a:endParaRPr lang="en-US" sz="950" dirty="0"/>
           </a:p>
@@ -5544,7 +5544,7 @@
                 <a:ea typeface="Work Sans" pitchFamily="34" charset="-122"/>
                 <a:cs typeface="Work Sans" pitchFamily="34" charset="-120"/>
               </a:rPr>
-              <a:t>SATIS GROUP — THE INVESTOR PLATFORM</a:t>
+              <a:t>SATIS GROUP · THE INVESTOR PLATFORM</a:t>
             </a:r>
             <a:endParaRPr lang="en-US" sz="700" dirty="0"/>
           </a:p>
@@ -5664,7 +5664,7 @@
                 <a:ea typeface="Work Sans" pitchFamily="34" charset="-122"/>
                 <a:cs typeface="Work Sans" pitchFamily="34" charset="-120"/>
               </a:rPr>
-              <a:t>Monthly reports tab. Reports reach invested clients only, the moment you publish — prospects never see construction detail.</a:t>
+              <a:t>Monthly reports tab. Reports reach invested clients only, the moment you publish. Prospects never see construction detail.</a:t>
             </a:r>
             <a:endParaRPr lang="en-US" sz="1150" dirty="0"/>
           </a:p>
@@ -5892,7 +5892,7 @@
                 <a:ea typeface="Work Sans" pitchFamily="34" charset="-122"/>
                 <a:cs typeface="Work Sans" pitchFamily="34" charset="-120"/>
               </a:rPr>
-              <a:t>Which project, and the month written out — “August 2026” is the headline investors see.</a:t>
+              <a:t>Which project, and the month written out. “August 2026” is the headline investors see.</a:t>
             </a:r>
             <a:endParaRPr lang="en-US" sz="950" dirty="0"/>
           </a:p>
@@ -6032,7 +6032,7 @@
                 <a:ea typeface="Work Sans" pitchFamily="34" charset="-122"/>
                 <a:cs typeface="Work Sans" pitchFamily="34" charset="-120"/>
               </a:rPr>
-              <a:t>One word for the kind of update — Construction, Planning, Lettings — and a one-line headline for the month.</a:t>
+              <a:t>One word for the kind of update (Construction, Planning, Lettings) and a one-line headline for the month.</a:t>
             </a:r>
             <a:endParaRPr lang="en-US" sz="950" dirty="0"/>
           </a:p>
@@ -6270,7 +6270,7 @@
                 <a:ea typeface="Work Sans" pitchFamily="34" charset="-122"/>
                 <a:cs typeface="Work Sans" pitchFamily="34" charset="-120"/>
               </a:rPr>
-              <a:t>Tasks — one per line</a:t>
+              <a:t>Tasks, one per line</a:t>
             </a:r>
             <a:endParaRPr lang="en-US" sz="1200" dirty="0"/>
           </a:p>
@@ -6312,7 +6312,7 @@
                 <a:ea typeface="Work Sans" pitchFamily="34" charset="-122"/>
                 <a:cs typeface="Work Sans" pitchFamily="34" charset="-120"/>
               </a:rPr>
-              <a:t>Three parts separated by spaced dashes: Title — detail — status. E.g. “Superstructure — Frame at level three — On programme”.</a:t>
+              <a:t>Three parts separated by spaced double dashes: Title -- detail -- status. For example: “Superstructure -- Frame at level three -- On programme”.</a:t>
             </a:r>
             <a:endParaRPr lang="en-US" sz="950" dirty="0"/>
           </a:p>
@@ -6410,7 +6410,7 @@
                 <a:ea typeface="Work Sans" pitchFamily="34" charset="-122"/>
                 <a:cs typeface="Work Sans" pitchFamily="34" charset="-120"/>
               </a:rPr>
-              <a:t>Report file — next slide</a:t>
+              <a:t>Report file: next slide</a:t>
             </a:r>
             <a:endParaRPr lang="en-US" sz="1200" dirty="0"/>
           </a:p>
@@ -6641,7 +6641,7 @@
                 <a:ea typeface="Work Sans" pitchFamily="34" charset="-122"/>
                 <a:cs typeface="Work Sans" pitchFamily="34" charset="-120"/>
               </a:rPr>
-              <a:t>ROUTINE — PUBLISHING</a:t>
+              <a:t>ROUTINE · PUBLISHING</a:t>
             </a:r>
             <a:endParaRPr lang="en-US" sz="950" dirty="0"/>
           </a:p>
@@ -6781,7 +6781,7 @@
                 <a:ea typeface="Work Sans" pitchFamily="34" charset="-122"/>
                 <a:cs typeface="Work Sans" pitchFamily="34" charset="-120"/>
               </a:rPr>
-              <a:t>SATIS GROUP — THE INVESTOR PLATFORM</a:t>
+              <a:t>SATIS GROUP · THE INVESTOR PLATFORM</a:t>
             </a:r>
             <a:endParaRPr lang="en-US" sz="700" dirty="0"/>
           </a:p>
@@ -6901,7 +6901,7 @@
                 <a:ea typeface="Work Sans" pitchFamily="34" charset="-122"/>
                 <a:cs typeface="Work Sans" pitchFamily="34" charset="-120"/>
               </a:rPr>
-              <a:t>The Report file box records where the PDF lives on the website — it does not upload the file. Getting it there is a one-off step per report:</a:t>
+              <a:t>The Report file box records where the PDF lives on the website. It does not upload the file. Getting it there is a one-off step per report:</a:t>
             </a:r>
             <a:endParaRPr lang="en-US" sz="1150" dirty="0"/>
           </a:p>
@@ -7041,7 +7041,7 @@
                 <a:ea typeface="Work Sans" pitchFamily="34" charset="-122"/>
                 <a:cs typeface="Work Sans" pitchFamily="34" charset="-120"/>
               </a:rPr>
-              <a:t>In a session on the website repository: “Add this PDF as public/investor-reports/august-2026.pdf” — and attach the file. Or hand it to the development team.</a:t>
+              <a:t>In a session on the website repository: “Add this PDF as public/investor-reports/august-2026.pdf”, and attach the file. Or hand it to the development team.</a:t>
             </a:r>
             <a:endParaRPr lang="en-US" sz="1050" dirty="0"/>
           </a:p>
@@ -7321,7 +7321,7 @@
                 <a:ea typeface="Work Sans" pitchFamily="34" charset="-122"/>
                 <a:cs typeface="Work Sans" pitchFamily="34" charset="-120"/>
               </a:rPr>
-              <a:t>The report still publishes — the portal's download button stays an inactive placeholder until a file is added.</a:t>
+              <a:t>The report still publishes. The portal's download button stays an inactive placeholder until a file is added.</a:t>
             </a:r>
             <a:endParaRPr lang="en-US" sz="1050" dirty="0"/>
           </a:p>
@@ -7451,7 +7451,7 @@
                 <a:ea typeface="Work Sans" pitchFamily="34" charset="-122"/>
                 <a:cs typeface="Work Sans" pitchFamily="34" charset="-120"/>
               </a:rPr>
-              <a:t>Each report shows its period, task count, and “report uploaded” or “no report file yet” — so missing files are visible at a glance.</a:t>
+              <a:t>Each report shows its period, task count, and “report uploaded” or “no report file yet”, so missing files are visible at a glance.</a:t>
             </a:r>
             <a:endParaRPr lang="en-US" sz="1100" dirty="0"/>
           </a:p>
@@ -7515,7 +7515,7 @@
                 <a:ea typeface="Work Sans" pitchFamily="34" charset="-122"/>
                 <a:cs typeface="Work Sans" pitchFamily="34" charset="-120"/>
               </a:rPr>
-              <a:t>ROUTINE — PUBLISHING</a:t>
+              <a:t>ROUTINE · PUBLISHING</a:t>
             </a:r>
             <a:endParaRPr lang="en-US" sz="950" dirty="0"/>
           </a:p>
@@ -7655,7 +7655,7 @@
                 <a:ea typeface="Work Sans" pitchFamily="34" charset="-122"/>
                 <a:cs typeface="Work Sans" pitchFamily="34" charset="-120"/>
               </a:rPr>
-              <a:t>SATIS GROUP — THE INVESTOR PLATFORM</a:t>
+              <a:t>SATIS GROUP · THE INVESTOR PLATFORM</a:t>
             </a:r>
             <a:endParaRPr lang="en-US" sz="700" dirty="0"/>
           </a:p>
@@ -7775,7 +7775,7 @@
                 <a:ea typeface="Work Sans" pitchFamily="34" charset="-122"/>
                 <a:cs typeface="Work Sans" pitchFamily="34" charset="-120"/>
               </a:rPr>
-              <a:t>Insights tab. Articles appear in the portal for both prospective and invested accounts — the same plain-typing style as news stories, with one extra trick.</a:t>
+              <a:t>Insights tab. Articles appear in the portal for both prospective and invested accounts, in the same plain-typing style as news stories, with one extra trick.</a:t>
             </a:r>
             <a:endParaRPr lang="en-US" sz="1150" dirty="0"/>
           </a:p>
@@ -8003,7 +8003,7 @@
                 <a:ea typeface="Work Sans" pitchFamily="34" charset="-122"/>
                 <a:cs typeface="Work Sans" pitchFamily="34" charset="-120"/>
               </a:rPr>
-              <a:t>Category is the card label — “Market note”, “Research”. Read time: about one minute per 200 words.</a:t>
+              <a:t>Category is the card label (“Market note”, “Research”). Read time: about one minute per 200 words.</a:t>
             </a:r>
             <a:endParaRPr lang="en-US" sz="950" dirty="0"/>
           </a:p>
@@ -8143,7 +8143,7 @@
                 <a:ea typeface="Work Sans" pitchFamily="34" charset="-122"/>
                 <a:cs typeface="Work Sans" pitchFamily="34" charset="-120"/>
               </a:rPr>
-              <a:t>Colour is purely cosmetic — balance the page. Slug: leave empty for new articles.</a:t>
+              <a:t>Colour is purely cosmetic; balance the page. Slug: leave empty for new articles.</a:t>
             </a:r>
             <a:endParaRPr lang="en-US" sz="950" dirty="0"/>
           </a:p>
@@ -8283,7 +8283,7 @@
                 <a:ea typeface="Work Sans" pitchFamily="34" charset="-122"/>
                 <a:cs typeface="Work Sans" pitchFamily="34" charset="-120"/>
               </a:rPr>
-              <a:t>Paragraphs, ## headings and - bullets as in news stories — plus pull quotes: start a line with &gt; and a space; credit on the next line as “— Savills Research, 2026”.</a:t>
+              <a:t>Paragraphs, ## headings and - bullets as in news stories, plus pull quotes: start a line with &gt; and a space. To credit someone, start the next line with two dashes: -- Savills Research, 2026.</a:t>
             </a:r>
             <a:endParaRPr lang="en-US" sz="950" dirty="0"/>
           </a:p>
@@ -8527,7 +8527,7 @@
                 <a:ea typeface="Work Sans" pitchFamily="34" charset="-122"/>
                 <a:cs typeface="Work Sans" pitchFamily="34" charset="-120"/>
               </a:rPr>
-              <a:t>Slugs replace — by design
+              <a:t>Slugs replace, by design
 </a:t>
             </a:r>
             <a:pPr indent="0" marL="0">
@@ -8548,7 +8548,7 @@
                 <a:ea typeface="Work Sans" pitchFamily="34" charset="-122"/>
                 <a:cs typeface="Work Sans" pitchFamily="34" charset="-120"/>
               </a:rPr>
-              <a:t>Typing an existing slug and publishing replaces that article (that is how you update one). The opposite of news stories — so keep the slug box empty for new pieces.</a:t>
+              <a:t>Typing an existing slug and publishing replaces that article (that is how you update one). The opposite of news stories, so keep the slug box empty for new pieces.</a:t>
             </a:r>
             <a:endParaRPr lang="en-US" sz="1100" dirty="0"/>
           </a:p>
@@ -8612,7 +8612,7 @@
                 <a:ea typeface="Work Sans" pitchFamily="34" charset="-122"/>
                 <a:cs typeface="Work Sans" pitchFamily="34" charset="-120"/>
               </a:rPr>
-              <a:t>ROUTINE — PUBLISHING</a:t>
+              <a:t>ROUTINE · PUBLISHING</a:t>
             </a:r>
             <a:endParaRPr lang="en-US" sz="950" dirty="0"/>
           </a:p>
@@ -8752,7 +8752,7 @@
                 <a:ea typeface="Work Sans" pitchFamily="34" charset="-122"/>
                 <a:cs typeface="Work Sans" pitchFamily="34" charset="-120"/>
               </a:rPr>
-              <a:t>SATIS GROUP — THE INVESTOR PLATFORM</a:t>
+              <a:t>SATIS GROUP · THE INVESTOR PLATFORM</a:t>
             </a:r>
             <a:endParaRPr lang="en-US" sz="700" dirty="0"/>
           </a:p>
@@ -8872,7 +8872,7 @@
                 <a:ea typeface="Work Sans" pitchFamily="34" charset="-122"/>
                 <a:cs typeface="Work Sans" pitchFamily="34" charset="-120"/>
               </a:rPr>
-              <a:t>Opportunities tab — the deal-flow page prospective investors browse, with live raises also flagged on every investor's overview. This is the shop window for prospects.</a:t>
+              <a:t>Opportunities tab: the deal-flow page prospective investors browse, with live raises also flagged on every investor's overview. This is the shop window for prospects.</a:t>
             </a:r>
             <a:endParaRPr lang="en-US" sz="1150" dirty="0"/>
           </a:p>
@@ -9240,7 +9240,7 @@
                 <a:ea typeface="Work Sans" pitchFamily="34" charset="-122"/>
                 <a:cs typeface="Work Sans" pitchFamily="34" charset="-120"/>
               </a:rPr>
-              <a:t>The progress bar is worked out from these two — £3.2m target with £2.1m raised shows 66%.</a:t>
+              <a:t>The progress bar is worked out from these two. £3.2m target with £2.1m raised shows 66%.</a:t>
             </a:r>
             <a:endParaRPr lang="en-US" sz="950" dirty="0"/>
           </a:p>
@@ -9380,7 +9380,7 @@
                 <a:ea typeface="Work Sans" pitchFamily="34" charset="-122"/>
                 <a:cs typeface="Work Sans" pitchFamily="34" charset="-120"/>
               </a:rPr>
-              <a:t>Min commitment, target IRR %, target multiple, horizon, and the structure — what investors actually buy, e.g. “Ordinary shares in Satis (QUBE) Ltd”.</a:t>
+              <a:t>Min commitment, target IRR %, target multiple, horizon, and the structure: what investors actually buy, e.g. “Ordinary shares in Satis (QUBE) Ltd”.</a:t>
             </a:r>
             <a:endParaRPr lang="en-US" sz="950" dirty="0"/>
           </a:p>
@@ -9645,7 +9645,7 @@
                 <a:ea typeface="Work Sans" pitchFamily="34" charset="-122"/>
                 <a:cs typeface="Work Sans" pitchFamily="34" charset="-120"/>
               </a:rPr>
-              <a:t>Update Raised to date as commitments land — a moving bar does more for momentum than any covering email. When the raise completes: status Fully subscribed, then record each position on the cap table — the moment prospects become invested.</a:t>
+              <a:t>Update Raised to date as commitments land. A moving bar does more for momentum than any covering email. When the raise completes: status Fully subscribed, then record each position on the cap table. That is the moment prospects become invested.</a:t>
             </a:r>
             <a:endParaRPr lang="en-US" sz="1100" dirty="0"/>
           </a:p>
@@ -9709,7 +9709,7 @@
                 <a:ea typeface="Work Sans" pitchFamily="34" charset="-122"/>
                 <a:cs typeface="Work Sans" pitchFamily="34" charset="-120"/>
               </a:rPr>
-              <a:t>ROUTINE — FIGURES</a:t>
+              <a:t>ROUTINE · FIGURES</a:t>
             </a:r>
             <a:endParaRPr lang="en-US" sz="950" dirty="0"/>
           </a:p>
@@ -9849,7 +9849,7 @@
                 <a:ea typeface="Work Sans" pitchFamily="34" charset="-122"/>
                 <a:cs typeface="Work Sans" pitchFamily="34" charset="-120"/>
               </a:rPr>
-              <a:t>SATIS GROUP — THE INVESTOR PLATFORM</a:t>
+              <a:t>SATIS GROUP · THE INVESTOR PLATFORM</a:t>
             </a:r>
             <a:endParaRPr lang="en-US" sz="700" dirty="0"/>
           </a:p>
@@ -10109,7 +10109,7 @@
                 <a:ea typeface="Work Sans" pitchFamily="34" charset="-122"/>
                 <a:cs typeface="Work Sans" pitchFamily="34" charset="-120"/>
               </a:rPr>
-              <a:t>Developments &amp; SPVs tab. Type the development's ID to update it — and fill in the whole form: saving replaces everything, so copy current values across first, change what changed, save. This one number moves every holder's value.</a:t>
+              <a:t>Developments &amp; SPVs tab. Type the development's ID to update it, and fill in the whole form: saving replaces everything, so copy current values across first, change what changed, save. This one number moves every holder's value.</a:t>
             </a:r>
             <a:endParaRPr lang="en-US" sz="1050" dirty="0"/>
           </a:p>
@@ -10249,7 +10249,7 @@
                 <a:ea typeface="Work Sans" pitchFamily="34" charset="-122"/>
                 <a:cs typeface="Work Sans" pitchFamily="34" charset="-120"/>
               </a:rPr>
-              <a:t>Investors tab → “Record quarterly valuation”: investor, period label (“Q3 2026”), portfolio value — normally exactly the computed value already shown on their card. Adds the point to their value-progression chart.</a:t>
+              <a:t>Investors tab → “Record quarterly valuation”: investor, period label (“Q3 2026”), portfolio value. Normally exactly the computed value already shown on their card. Adds the point to their value-progression chart.</a:t>
             </a:r>
             <a:endParaRPr lang="en-US" sz="1050" dirty="0"/>
           </a:p>
@@ -10389,7 +10389,7 @@
                 <a:ea typeface="Work Sans" pitchFamily="34" charset="-122"/>
                 <a:cs typeface="Work Sans" pitchFamily="34" charset="-120"/>
               </a:rPr>
-              <a:t>As covered — one per development, while the valuation numbers are fresh.</a:t>
+              <a:t>As covered: one per development, while the valuation numbers are fresh.</a:t>
             </a:r>
             <a:endParaRPr lang="en-US" sz="1050" dirty="0"/>
           </a:p>
@@ -10514,7 +10514,7 @@
                 <a:ea typeface="Work Sans" pitchFamily="34" charset="-122"/>
                 <a:cs typeface="Work Sans" pitchFamily="34" charset="-120"/>
               </a:rPr>
-              <a:t>Updating a development with only one box filled saves the other fields empty. Copy the card's current values into the form first — then edit.</a:t>
+              <a:t>Updating a development with only one box filled saves the other fields empty. Copy the card's current values into the form first, then edit.</a:t>
             </a:r>
             <a:endParaRPr lang="en-US" sz="1100" dirty="0"/>
           </a:p>
@@ -10578,7 +10578,7 @@
                 <a:ea typeface="Work Sans" pitchFamily="34" charset="-122"/>
                 <a:cs typeface="Work Sans" pitchFamily="34" charset="-120"/>
               </a:rPr>
-              <a:t>ROUTINE — DOCUMENTS</a:t>
+              <a:t>ROUTINE · DOCUMENTS</a:t>
             </a:r>
             <a:endParaRPr lang="en-US" sz="950" dirty="0"/>
           </a:p>
@@ -10718,7 +10718,7 @@
                 <a:ea typeface="Work Sans" pitchFamily="34" charset="-122"/>
                 <a:cs typeface="Work Sans" pitchFamily="34" charset="-120"/>
               </a:rPr>
-              <a:t>SATIS GROUP — THE INVESTOR PLATFORM</a:t>
+              <a:t>SATIS GROUP · THE INVESTOR PLATFORM</a:t>
             </a:r>
             <a:endParaRPr lang="en-US" sz="700" dirty="0"/>
           </a:p>
@@ -10838,7 +10838,7 @@
                 <a:ea typeface="Work Sans" pitchFamily="34" charset="-122"/>
                 <a:cs typeface="Work Sans" pitchFamily="34" charset="-120"/>
               </a:rPr>
-              <a:t>Documents are the one dataset without a form — the easiest way to change them is to ask Claude. Getting the audience right matters more than anything else here:</a:t>
+              <a:t>Documents are the one dataset without a form; the easiest way to change them is to ask Claude. Getting the audience right matters more than anything else here:</a:t>
             </a:r>
             <a:endParaRPr lang="en-US" sz="1150" dirty="0"/>
           </a:p>
@@ -10978,7 +10978,7 @@
                 <a:ea typeface="Work Sans" pitchFamily="34" charset="-122"/>
                 <a:cs typeface="Work Sans" pitchFamily="34" charset="-120"/>
               </a:rPr>
-              <a:t>Every prospective (and invested) investor — marketing material like a raise memorandum. Or one investor only — a private document like their subscription agreement.</a:t>
+              <a:t>Every prospective (and invested) investor: marketing material like a raise memorandum. Or one investor only: a private document like their subscription agreement.</a:t>
             </a:r>
             <a:endParaRPr lang="en-US" sz="1050" dirty="0"/>
           </a:p>
@@ -11076,7 +11076,7 @@
                 <a:ea typeface="Work Sans" pitchFamily="34" charset="-122"/>
                 <a:cs typeface="Work Sans" pitchFamily="34" charset="-120"/>
               </a:rPr>
-              <a:t>Ask Claude — two proven forms</a:t>
+              <a:t>Ask Claude, two proven forms</a:t>
             </a:r>
             <a:endParaRPr lang="en-US" sz="1200" dirty="0"/>
           </a:p>
@@ -11118,7 +11118,7 @@
                 <a:ea typeface="Work Sans" pitchFamily="34" charset="-122"/>
                 <a:cs typeface="Work Sans" pitchFamily="34" charset="-120"/>
               </a:rPr>
-              <a:t>“Add this PDF to the investor data room for all prospective investors: title ‘QUBE Stockport — Investment Memorandum’, dated 2026-08-19.” · “Add a private data-room document for the Hartwell account only, titled ‘Subscription agreement — signed’, using this PDF.”</a:t>
+              <a:t>“Add this PDF to the investor data room for all prospective investors: title ‘QUBE Stockport, Investment Memorandum’, dated 2026-08-19.” · “Add a private data-room document for the Hartwell account only, titled ‘Subscription agreement, signed’, using this PDF.”</a:t>
             </a:r>
             <a:endParaRPr lang="en-US" sz="1050" dirty="0"/>
           </a:p>
@@ -11383,7 +11383,7 @@
                 <a:ea typeface="Work Sans" pitchFamily="34" charset="-122"/>
                 <a:cs typeface="Work Sans" pitchFamily="34" charset="-120"/>
               </a:rPr>
-              <a:t>A document entry with no file still appears as a listed item — useful for “available on request” material.</a:t>
+              <a:t>A document entry with no file still appears as a listed item. Useful for “available on request” material.</a:t>
             </a:r>
             <a:endParaRPr lang="en-US" sz="1100" dirty="0"/>
           </a:p>
@@ -11447,7 +11447,7 @@
                 <a:ea typeface="Work Sans" pitchFamily="34" charset="-122"/>
                 <a:cs typeface="Work Sans" pitchFamily="34" charset="-120"/>
               </a:rPr>
-              <a:t>ROUTINE — SUPPORT</a:t>
+              <a:t>ROUTINE · SUPPORT</a:t>
             </a:r>
             <a:endParaRPr lang="en-US" sz="950" dirty="0"/>
           </a:p>
@@ -11587,7 +11587,7 @@
                 <a:ea typeface="Work Sans" pitchFamily="34" charset="-122"/>
                 <a:cs typeface="Work Sans" pitchFamily="34" charset="-120"/>
               </a:rPr>
-              <a:t>SATIS GROUP — THE INVESTOR PLATFORM</a:t>
+              <a:t>SATIS GROUP · THE INVESTOR PLATFORM</a:t>
             </a:r>
             <a:endParaRPr lang="en-US" sz="700" dirty="0"/>
           </a:p>
@@ -11707,7 +11707,7 @@
                 <a:ea typeface="Work Sans" pitchFamily="34" charset="-122"/>
                 <a:cs typeface="Work Sans" pitchFamily="34" charset="-120"/>
               </a:rPr>
-              <a:t>Every “I can't get in” comes down to one of these — all fixable in minutes:</a:t>
+              <a:t>Every “I can't get in” comes down to one of these, all fixable in minutes:</a:t>
             </a:r>
             <a:endParaRPr lang="en-US" sz="1150" dirty="0"/>
           </a:p>
@@ -11798,7 +11798,7 @@
                 <a:ea typeface="Work Sans" pitchFamily="34" charset="-122"/>
                 <a:cs typeface="Work Sans" pitchFamily="34" charset="-120"/>
               </a:rPr>
-              <a:t>Investors tab → note the account's ID → type it into the form, re-enter name, first name and email exactly as shown, type a new password, save. Tell them by phone — then they sign in.</a:t>
+              <a:t>Investors tab → note the account's ID → type it into the form, re-enter name, first name and email exactly as shown, type a new password, save. Tell them by phone; then they sign in.</a:t>
             </a:r>
             <a:endParaRPr lang="en-US" sz="1100" dirty="0"/>
           </a:p>
@@ -11889,7 +11889,7 @@
                 <a:ea typeface="Work Sans" pitchFamily="34" charset="-122"/>
                 <a:cs typeface="Work Sans" pitchFamily="34" charset="-120"/>
               </a:rPr>
-              <a:t>Five failures pauses their connection. Have them wait 15 minutes — and reset the password meanwhile if they're unsure of it, so the next try succeeds.</a:t>
+              <a:t>Five failures pauses their connection. Have them wait 15 minutes, and reset the password meanwhile if they're unsure of it, so the next try succeeds.</a:t>
             </a:r>
             <a:endParaRPr lang="en-US" sz="1100" dirty="0"/>
           </a:p>
@@ -11980,7 +11980,7 @@
                 <a:ea typeface="Work Sans" pitchFamily="34" charset="-122"/>
                 <a:cs typeface="Work Sans" pitchFamily="34" charset="-120"/>
               </a:rPr>
-              <a:t>Sessions last 24 hours then quietly expire — protection, not a fault. They sign in again; nothing is lost.</a:t>
+              <a:t>Sessions last 24 hours then quietly expire. Protection, not a fault. They sign in again; nothing is lost.</a:t>
             </a:r>
             <a:endParaRPr lang="en-US" sz="1100" dirty="0"/>
           </a:p>
@@ -12044,7 +12044,7 @@
                 <a:ea typeface="Work Sans" pitchFamily="34" charset="-122"/>
                 <a:cs typeface="Work Sans" pitchFamily="34" charset="-120"/>
               </a:rPr>
-              <a:t>ROUTINE — DATA</a:t>
+              <a:t>ROUTINE · DATA</a:t>
             </a:r>
             <a:endParaRPr lang="en-US" sz="950" dirty="0"/>
           </a:p>
@@ -12184,7 +12184,7 @@
                 <a:ea typeface="Work Sans" pitchFamily="34" charset="-122"/>
                 <a:cs typeface="Work Sans" pitchFamily="34" charset="-120"/>
               </a:rPr>
-              <a:t>SATIS GROUP — THE INVESTOR PLATFORM</a:t>
+              <a:t>SATIS GROUP · THE INVESTOR PLATFORM</a:t>
             </a:r>
             <a:endParaRPr lang="en-US" sz="700" dirty="0"/>
           </a:p>
@@ -12307,7 +12307,7 @@
                 <a:ea typeface="Work Sans" pitchFamily="34" charset="-122"/>
                 <a:cs typeface="Work Sans" pitchFamily="34" charset="-120"/>
               </a:rPr>
-              <a:t>Export current dataset downloads everything — every investor, development, cap table, report, insight and opportunity — as one file, exactly as the live site serves it.
+              <a:t>Export current dataset downloads everything (every investor, development, cap table, report, insight and opportunity) as one file, exactly as the live site serves it.
 </a:t>
             </a:r>
             <a:pPr indent="0" marL="0">
@@ -12349,7 +12349,7 @@
                 <a:ea typeface="Work Sans" pitchFamily="34" charset="-122"/>
                 <a:cs typeface="Work Sans" pitchFamily="34" charset="-120"/>
               </a:rPr>
-              <a:t>Export before any big editing session — the file is a perfect backup and a perfect restore.
+              <a:t>Export before any big editing session. The file is a perfect backup and a perfect restore.
 </a:t>
             </a:r>
             <a:endParaRPr lang="en-US" sz="1100" dirty="0"/>
@@ -12438,7 +12438,7 @@
                 <a:ea typeface="Work Sans" pitchFamily="34" charset="-122"/>
                 <a:cs typeface="Work Sans" pitchFamily="34" charset="-120"/>
               </a:rPr>
-              <a:t>The Import / export tab — the platform's back-up door.</a:t>
+              <a:t>The Import / export tab: the platform's back-up door.</a:t>
             </a:r>
             <a:endParaRPr lang="en-US" sz="850" dirty="0"/>
           </a:p>
@@ -12563,7 +12563,7 @@
                 <a:ea typeface="Work Sans" pitchFamily="34" charset="-122"/>
                 <a:cs typeface="Work Sans" pitchFamily="34" charset="-120"/>
               </a:rPr>
-              <a:t>Structured text computers read reliably. You never write it by hand — Claude reads and edits it for you.</a:t>
+              <a:t>Structured text computers read reliably. You never write it by hand; Claude reads and edits it for you.</a:t>
             </a:r>
             <a:endParaRPr lang="en-US" sz="1100" dirty="0"/>
           </a:p>
@@ -12767,7 +12767,7 @@
                 <a:ea typeface="Work Sans" pitchFamily="34" charset="-122"/>
                 <a:cs typeface="Work Sans" pitchFamily="34" charset="-120"/>
               </a:rPr>
-              <a:t>SATIS GROUP — THE INVESTOR PLATFORM</a:t>
+              <a:t>SATIS GROUP · THE INVESTOR PLATFORM</a:t>
             </a:r>
             <a:endParaRPr lang="en-US" sz="700" dirty="0"/>
           </a:p>
@@ -12887,7 +12887,7 @@
                 <a:ea typeface="Work Sans" pitchFamily="34" charset="-122"/>
                 <a:cs typeface="Work Sans" pitchFamily="34" charset="-120"/>
               </a:rPr>
-              <a:t>Everything an investor sees is generated from a handful of datasets you edit in one place — the platform studio.</a:t>
+              <a:t>Everything an investor sees is generated from a handful of datasets you edit in one place: the platform studio.</a:t>
             </a:r>
             <a:endParaRPr lang="en-US" sz="1150" dirty="0"/>
           </a:p>
@@ -13818,7 +13818,7 @@
                 <a:ea typeface="Work Sans" pitchFamily="34" charset="-122"/>
                 <a:cs typeface="Work Sans" pitchFamily="34" charset="-120"/>
               </a:rPr>
-              <a:t>SATIS GROUP — THE INVESTOR PLATFORM</a:t>
+              <a:t>SATIS GROUP · THE INVESTOR PLATFORM</a:t>
             </a:r>
             <a:endParaRPr lang="en-US" sz="700" dirty="0"/>
           </a:p>
@@ -14168,7 +14168,7 @@
                 <a:ea typeface="Work Sans" pitchFamily="34" charset="-122"/>
                 <a:cs typeface="Work Sans" pitchFamily="34" charset="-120"/>
               </a:rPr>
-              <a:t>Start with “How the investor platform fits together” — five minutes.</a:t>
+              <a:t>Start with “How the investor platform fits together”. Five minutes.</a:t>
             </a:r>
             <a:endParaRPr lang="en-US" sz="1050" dirty="0"/>
           </a:p>
@@ -14473,7 +14473,7 @@
                 <a:ea typeface="Work Sans" pitchFamily="34" charset="-122"/>
                 <a:cs typeface="Work Sans" pitchFamily="34" charset="-120"/>
               </a:rPr>
-              <a:t>SATIS GROUP — THE INVESTOR PLATFORM</a:t>
+              <a:t>SATIS GROUP · THE INVESTOR PLATFORM</a:t>
             </a:r>
             <a:endParaRPr lang="en-US" sz="700" dirty="0"/>
           </a:p>
@@ -14596,7 +14596,7 @@
                 <a:ea typeface="Work Sans" pitchFamily="34" charset="-122"/>
                 <a:cs typeface="Work Sans" pitchFamily="34" charset="-120"/>
               </a:rPr>
-              <a:t>Investors sign in with their email address and a password you set for them. Sessions last 24 hours; five wrong tries pauses that connection for 15 minutes — the same protections as the admin.
+              <a:t>Investors sign in with their email address and a password you set for them. Sessions last 24 hours; five wrong tries pauses that connection for 15 minutes. The same protections as the admin.
 </a:t>
             </a:r>
             <a:pPr indent="0" marL="0">
@@ -14617,7 +14617,7 @@
                 <a:ea typeface="Work Sans" pitchFamily="34" charset="-122"/>
                 <a:cs typeface="Work Sans" pitchFamily="34" charset="-120"/>
               </a:rPr>
-              <a:t>Not an investor yet? The “Become an investor” buttons lead to a short enquiry form at /investors/enquire — name, email, company — styled to match the platform.
+              <a:t>Not an investor yet? The “Become an investor” buttons lead to a short enquiry form at /investors/enquire (name, email, company), styled to match the platform.
 </a:t>
             </a:r>
             <a:endParaRPr lang="en-US" sz="1100" dirty="0"/>
@@ -14706,7 +14706,7 @@
                 <a:ea typeface="Work Sans" pitchFamily="34" charset="-122"/>
                 <a:cs typeface="Work Sans" pitchFamily="34" charset="-120"/>
               </a:rPr>
-              <a:t>The investor platform's own sign-in — black and gold, separate from the admin.</a:t>
+              <a:t>The investor platform's own sign-in: black and gold, separate from the admin.</a:t>
             </a:r>
             <a:endParaRPr lang="en-US" sz="850" dirty="0"/>
           </a:p>
@@ -14831,7 +14831,7 @@
                 <a:ea typeface="Work Sans" pitchFamily="34" charset="-122"/>
                 <a:cs typeface="Work Sans" pitchFamily="34" charset="-120"/>
               </a:rPr>
-              <a:t>Investor accounts are managed inside the platform studio — not on the admin accounts page. Different system entirely.</a:t>
+              <a:t>Investor accounts are managed inside the platform studio, not on the admin accounts page. Different system entirely.</a:t>
             </a:r>
             <a:endParaRPr lang="en-US" sz="1100" dirty="0"/>
           </a:p>
@@ -15035,7 +15035,7 @@
                 <a:ea typeface="Work Sans" pitchFamily="34" charset="-122"/>
                 <a:cs typeface="Work Sans" pitchFamily="34" charset="-120"/>
               </a:rPr>
-              <a:t>SATIS GROUP — THE INVESTOR PLATFORM</a:t>
+              <a:t>SATIS GROUP · THE INVESTOR PLATFORM</a:t>
             </a:r>
             <a:endParaRPr lang="en-US" sz="700" dirty="0"/>
           </a:p>
@@ -15179,7 +15179,7 @@
                 <a:ea typeface="Work Sans" pitchFamily="34" charset="-122"/>
                 <a:cs typeface="Work Sans" pitchFamily="34" charset="-120"/>
               </a:rPr>
-              <a:t>Every single figure on this screen is generated from something you edit in the platform studio — nothing on the portal is typed directly.
+              <a:t>Every single figure on this screen is generated from something you edit in the platform studio. Nothing on the portal is typed directly.
 </a:t>
             </a:r>
             <a:pPr indent="0" marL="0">
@@ -15200,7 +15200,7 @@
                 <a:ea typeface="Work Sans" pitchFamily="34" charset="-122"/>
                 <a:cs typeface="Work Sans" pitchFamily="34" charset="-120"/>
               </a:rPr>
-              <a:t>The sidebar navigation adapts to the kind of account — next slide.
+              <a:t>The sidebar navigation adapts to the kind of account. Next slide.
 </a:t>
             </a:r>
             <a:endParaRPr lang="en-US" sz="1100" dirty="0"/>
@@ -15289,7 +15289,7 @@
                 <a:ea typeface="Work Sans" pitchFamily="34" charset="-122"/>
                 <a:cs typeface="Work Sans" pitchFamily="34" charset="-120"/>
               </a:rPr>
-              <a:t>An invested client's overview — portfolio value, committed capital, weighted IRR, distributions.</a:t>
+              <a:t>An invested client's overview: portfolio value, committed capital, weighted IRR, distributions.</a:t>
             </a:r>
             <a:endParaRPr lang="en-US" sz="850" dirty="0"/>
           </a:p>
@@ -15493,7 +15493,7 @@
                 <a:ea typeface="Work Sans" pitchFamily="34" charset="-122"/>
                 <a:cs typeface="Work Sans" pitchFamily="34" charset="-120"/>
               </a:rPr>
-              <a:t>SATIS GROUP — THE INVESTOR PLATFORM</a:t>
+              <a:t>SATIS GROUP · THE INVESTOR PLATFORM</a:t>
             </a:r>
             <a:endParaRPr lang="en-US" sz="700" dirty="0"/>
           </a:p>
@@ -15613,7 +15613,7 @@
                 <a:ea typeface="Work Sans" pitchFamily="34" charset="-122"/>
                 <a:cs typeface="Work Sans" pitchFamily="34" charset="-120"/>
               </a:rPr>
-              <a:t>Every account is either prospective or invested — and the platform works the type out automatically: an account holding a position counts as invested.</a:t>
+              <a:t>Every account is either prospective or invested, and the platform works the type out automatically: an account holding a position counts as invested.</a:t>
             </a:r>
             <a:endParaRPr lang="en-US" sz="1150" dirty="0"/>
           </a:p>
@@ -15683,7 +15683,7 @@
                 <a:ea typeface="Work Sans" pitchFamily="34" charset="-122"/>
                 <a:cs typeface="Work Sans" pitchFamily="34" charset="-120"/>
               </a:rPr>
-              <a:t>Prospective — considering investing
+              <a:t>Prospective: considering investing
 </a:t>
             </a:r>
             <a:pPr indent="0" marL="0">
@@ -15725,7 +15725,7 @@
                 <a:ea typeface="Work Sans" pitchFamily="34" charset="-122"/>
                 <a:cs typeface="Work Sans" pitchFamily="34" charset="-120"/>
               </a:rPr>
-              <a:t>Does not see: cap tables, financials, monthly reports — construction detail stays with committed investors.
+              <a:t>Does not see: cap tables, financials, monthly reports. Construction detail stays with committed investors.
 </a:t>
             </a:r>
             <a:pPr indent="0" marL="0">
@@ -15816,7 +15816,7 @@
                 <a:ea typeface="Work Sans" pitchFamily="34" charset="-122"/>
                 <a:cs typeface="Work Sans" pitchFamily="34" charset="-120"/>
               </a:rPr>
-              <a:t>Invested — money in
+              <a:t>Invested: money in
 </a:t>
             </a:r>
             <a:pPr indent="0" marL="0">
@@ -15837,7 +15837,7 @@
                 <a:ea typeface="Work Sans" pitchFamily="34" charset="-122"/>
                 <a:cs typeface="Work Sans" pitchFamily="34" charset="-120"/>
               </a:rPr>
-              <a:t>Sees: overview (with live raises flagged), My portfolio — a tab per investment with its files — developments, monthly reports, market intelligence, insights, financials and documents.
+              <a:t>Sees: overview (with live raises flagged), My portfolio (a tab per investment with its files), developments, monthly reports, market intelligence, insights, financials and documents.
 </a:t>
             </a:r>
             <a:pPr indent="0" marL="0">
@@ -16083,7 +16083,7 @@
                 <a:ea typeface="Work Sans" pitchFamily="34" charset="-122"/>
                 <a:cs typeface="Work Sans" pitchFamily="34" charset="-120"/>
               </a:rPr>
-              <a:t>SATIS GROUP — THE INVESTOR PLATFORM</a:t>
+              <a:t>SATIS GROUP · THE INVESTOR PLATFORM</a:t>
             </a:r>
             <a:endParaRPr lang="en-US" sz="700" dirty="0"/>
           </a:p>
@@ -16991,7 +16991,7 @@
                 <a:ea typeface="Work Sans" pitchFamily="34" charset="-122"/>
                 <a:cs typeface="Work Sans" pitchFamily="34" charset="-120"/>
               </a:rPr>
-              <a:t>Everything as one file — backup, bulk edit, restore.</a:t>
+              <a:t>Everything as one file: backup, bulk edit, restore.</a:t>
             </a:r>
             <a:endParaRPr lang="en-US" sz="1000" dirty="0"/>
           </a:p>
@@ -17195,7 +17195,7 @@
                 <a:ea typeface="Work Sans" pitchFamily="34" charset="-122"/>
                 <a:cs typeface="Work Sans" pitchFamily="34" charset="-120"/>
               </a:rPr>
-              <a:t>SATIS GROUP — THE INVESTOR PLATFORM</a:t>
+              <a:t>SATIS GROUP · THE INVESTOR PLATFORM</a:t>
             </a:r>
             <a:endParaRPr lang="en-US" sz="700" dirty="0"/>
           </a:p>
@@ -17731,7 +17731,7 @@
                 <a:ea typeface="Work Sans" pitchFamily="34" charset="-122"/>
                 <a:cs typeface="Work Sans" pitchFamily="34" charset="-120"/>
               </a:rPr>
-              <a:t>A revaluation is one edit — update the SPV's equity value and every holder's figures move at once. And when a portal figure looks wrong, the cause is always one of these two numbers: the share % or the equity value. Check both; the culprit is one of them.</a:t>
+              <a:t>A revaluation is one edit: update the SPV's equity value and every holder's figures move at once. And when a portal figure looks wrong, the cause is always one of these two numbers, the share % or the equity value. Check both; the culprit is one of them.</a:t>
             </a:r>
             <a:endParaRPr lang="en-US" sz="1150" dirty="0"/>
           </a:p>
@@ -17795,7 +17795,7 @@
                 <a:ea typeface="Work Sans" pitchFamily="34" charset="-122"/>
                 <a:cs typeface="Work Sans" pitchFamily="34" charset="-120"/>
               </a:rPr>
-              <a:t>ROUTINE — ACCOUNTS</a:t>
+              <a:t>ROUTINE · ACCOUNTS</a:t>
             </a:r>
             <a:endParaRPr lang="en-US" sz="950" dirty="0"/>
           </a:p>
@@ -17935,7 +17935,7 @@
                 <a:ea typeface="Work Sans" pitchFamily="34" charset="-122"/>
                 <a:cs typeface="Work Sans" pitchFamily="34" charset="-120"/>
               </a:rPr>
-              <a:t>SATIS GROUP — THE INVESTOR PLATFORM</a:t>
+              <a:t>SATIS GROUP · THE INVESTOR PLATFORM</a:t>
             </a:r>
             <a:endParaRPr lang="en-US" sz="700" dirty="0"/>
           </a:p>
@@ -18143,7 +18143,7 @@
                 <a:ea typeface="Work Sans" pitchFamily="34" charset="-122"/>
                 <a:cs typeface="Work Sans" pitchFamily="34" charset="-120"/>
               </a:rPr>
-              <a:t>Numbers match the on-screen badges. After Save investor: a green confirmation, and the account lists as “Prospective investor”, £0, 0 positions — exactly right before any holding exists.</a:t>
+              <a:t>Numbers match the on-screen badges. After Save investor: a green confirmation, and the account lists as “Prospective investor”, £0, 0 positions. Exactly right before any holding exists.</a:t>
             </a:r>
             <a:endParaRPr lang="en-US" sz="850" dirty="0"/>
           </a:p>
@@ -18283,7 +18283,7 @@
                 <a:ea typeface="Work Sans" pitchFamily="34" charset="-122"/>
                 <a:cs typeface="Work Sans" pitchFamily="34" charset="-120"/>
               </a:rPr>
-              <a:t>As it should appear in their portal — e.g. “Hartwell Family Office”.</a:t>
+              <a:t>As it should appear in their portal, e.g. “Hartwell Family Office”.</a:t>
             </a:r>
             <a:endParaRPr lang="en-US" sz="950" dirty="0"/>
           </a:p>
@@ -18423,7 +18423,7 @@
                 <a:ea typeface="Work Sans" pitchFamily="34" charset="-122"/>
                 <a:cs typeface="Work Sans" pitchFamily="34" charset="-120"/>
               </a:rPr>
-              <a:t>Used for greetings — “Good morning, James”.</a:t>
+              <a:t>Used for greetings (“Good morning, James”).</a:t>
             </a:r>
             <a:endParaRPr lang="en-US" sz="950" dirty="0"/>
           </a:p>
@@ -18521,7 +18521,7 @@
                 <a:ea typeface="Work Sans" pitchFamily="34" charset="-122"/>
                 <a:cs typeface="Work Sans" pitchFamily="34" charset="-120"/>
               </a:rPr>
-              <a:t>Account ID — leave empty</a:t>
+              <a:t>Account ID: leave empty</a:t>
             </a:r>
             <a:endParaRPr lang="en-US" sz="1200" dirty="0"/>
           </a:p>
@@ -18703,7 +18703,7 @@
                 <a:ea typeface="Work Sans" pitchFamily="34" charset="-122"/>
                 <a:cs typeface="Work Sans" pitchFamily="34" charset="-120"/>
               </a:rPr>
-              <a:t>What they sign in with. Double-check the spelling — a typo locks them out.</a:t>
+              <a:t>What they sign in with. Double-check the spelling; a typo locks them out.</a:t>
             </a:r>
             <a:endParaRPr lang="en-US" sz="950" dirty="0"/>
           </a:p>
@@ -18801,7 +18801,7 @@
                 <a:ea typeface="Work Sans" pitchFamily="34" charset="-122"/>
                 <a:cs typeface="Work Sans" pitchFamily="34" charset="-120"/>
               </a:rPr>
-              <a:t>Account type — leave as is</a:t>
+              <a:t>Account type: leave as is</a:t>
             </a:r>
             <a:endParaRPr lang="en-US" sz="1200" dirty="0"/>
           </a:p>
@@ -18941,7 +18941,7 @@
                 <a:ea typeface="Work Sans" pitchFamily="34" charset="-122"/>
                 <a:cs typeface="Work Sans" pitchFamily="34" charset="-120"/>
               </a:rPr>
-              <a:t>Password — note it now</a:t>
+              <a:t>Password: note it now</a:t>
             </a:r>
             <a:endParaRPr lang="en-US" sz="1200" dirty="0"/>
           </a:p>
@@ -19047,7 +19047,7 @@
                 <a:ea typeface="Work Sans" pitchFamily="34" charset="-122"/>
                 <a:cs typeface="Work Sans" pitchFamily="34" charset="-120"/>
               </a:rPr>
-              <a:t>ROUTINE — ACCOUNTS</a:t>
+              <a:t>ROUTINE · ACCOUNTS</a:t>
             </a:r>
             <a:endParaRPr lang="en-US" sz="950" dirty="0"/>
           </a:p>
@@ -19187,7 +19187,7 @@
                 <a:ea typeface="Work Sans" pitchFamily="34" charset="-122"/>
                 <a:cs typeface="Work Sans" pitchFamily="34" charset="-120"/>
               </a:rPr>
-              <a:t>SATIS GROUP — THE INVESTOR PLATFORM</a:t>
+              <a:t>SATIS GROUP · THE INVESTOR PLATFORM</a:t>
             </a:r>
             <a:endParaRPr lang="en-US" sz="700" dirty="0"/>
           </a:p>
@@ -19265,7 +19265,7 @@
                 <a:ea typeface="Work Sans" pitchFamily="34" charset="-122"/>
                 <a:cs typeface="Work Sans" pitchFamily="34" charset="-120"/>
               </a:rPr>
-              <a:t>Handing over credentials — safely.</a:t>
+              <a:t>Handing over credentials, safely.</a:t>
             </a:r>
             <a:endParaRPr lang="en-US" sz="2500" dirty="0"/>
           </a:p>
